--- a/70_LIBERACION_QC/Docs/[QC] Reporte Material Liberado.pptx
+++ b/70_LIBERACION_QC/Docs/[QC] Reporte Material Liberado.pptx
@@ -209,7 +209,7 @@
           <a:p>
             <a:fld id="{A17B1792-3256-4E77-8442-3E205CD69EF5}" type="datetimeFigureOut">
               <a:rPr lang="en-US" smtClean="0"/>
-              <a:t>9/6/2021</a:t>
+              <a:t>11/15/2021</a:t>
             </a:fld>
             <a:endParaRPr lang="en-US"/>
           </a:p>
@@ -655,7 +655,7 @@
           <a:p>
             <a:fld id="{07558649-2619-44F9-8F30-2D6466E57529}" type="datetimeFigureOut">
               <a:rPr lang="en-US" smtClean="0"/>
-              <a:t>9/6/2021</a:t>
+              <a:t>11/15/2021</a:t>
             </a:fld>
             <a:endParaRPr lang="en-US"/>
           </a:p>
@@ -823,7 +823,7 @@
           <a:p>
             <a:fld id="{07558649-2619-44F9-8F30-2D6466E57529}" type="datetimeFigureOut">
               <a:rPr lang="en-US" smtClean="0"/>
-              <a:t>9/6/2021</a:t>
+              <a:t>11/15/2021</a:t>
             </a:fld>
             <a:endParaRPr lang="en-US"/>
           </a:p>
@@ -1001,7 +1001,7 @@
           <a:p>
             <a:fld id="{07558649-2619-44F9-8F30-2D6466E57529}" type="datetimeFigureOut">
               <a:rPr lang="en-US" smtClean="0"/>
-              <a:t>9/6/2021</a:t>
+              <a:t>11/15/2021</a:t>
             </a:fld>
             <a:endParaRPr lang="en-US"/>
           </a:p>
@@ -1169,7 +1169,7 @@
           <a:p>
             <a:fld id="{07558649-2619-44F9-8F30-2D6466E57529}" type="datetimeFigureOut">
               <a:rPr lang="en-US" smtClean="0"/>
-              <a:t>9/6/2021</a:t>
+              <a:t>11/15/2021</a:t>
             </a:fld>
             <a:endParaRPr lang="en-US"/>
           </a:p>
@@ -1414,7 +1414,7 @@
           <a:p>
             <a:fld id="{07558649-2619-44F9-8F30-2D6466E57529}" type="datetimeFigureOut">
               <a:rPr lang="en-US" smtClean="0"/>
-              <a:t>9/6/2021</a:t>
+              <a:t>11/15/2021</a:t>
             </a:fld>
             <a:endParaRPr lang="en-US"/>
           </a:p>
@@ -1699,7 +1699,7 @@
           <a:p>
             <a:fld id="{07558649-2619-44F9-8F30-2D6466E57529}" type="datetimeFigureOut">
               <a:rPr lang="en-US" smtClean="0"/>
-              <a:t>9/6/2021</a:t>
+              <a:t>11/15/2021</a:t>
             </a:fld>
             <a:endParaRPr lang="en-US"/>
           </a:p>
@@ -2118,7 +2118,7 @@
           <a:p>
             <a:fld id="{07558649-2619-44F9-8F30-2D6466E57529}" type="datetimeFigureOut">
               <a:rPr lang="en-US" smtClean="0"/>
-              <a:t>9/6/2021</a:t>
+              <a:t>11/15/2021</a:t>
             </a:fld>
             <a:endParaRPr lang="en-US"/>
           </a:p>
@@ -2235,7 +2235,7 @@
           <a:p>
             <a:fld id="{07558649-2619-44F9-8F30-2D6466E57529}" type="datetimeFigureOut">
               <a:rPr lang="en-US" smtClean="0"/>
-              <a:t>9/6/2021</a:t>
+              <a:t>11/15/2021</a:t>
             </a:fld>
             <a:endParaRPr lang="en-US"/>
           </a:p>
@@ -2330,7 +2330,7 @@
           <a:p>
             <a:fld id="{07558649-2619-44F9-8F30-2D6466E57529}" type="datetimeFigureOut">
               <a:rPr lang="en-US" smtClean="0"/>
-              <a:t>9/6/2021</a:t>
+              <a:t>11/15/2021</a:t>
             </a:fld>
             <a:endParaRPr lang="en-US"/>
           </a:p>
@@ -2605,7 +2605,7 @@
           <a:p>
             <a:fld id="{07558649-2619-44F9-8F30-2D6466E57529}" type="datetimeFigureOut">
               <a:rPr lang="en-US" smtClean="0"/>
-              <a:t>9/6/2021</a:t>
+              <a:t>11/15/2021</a:t>
             </a:fld>
             <a:endParaRPr lang="en-US"/>
           </a:p>
@@ -2857,7 +2857,7 @@
           <a:p>
             <a:fld id="{07558649-2619-44F9-8F30-2D6466E57529}" type="datetimeFigureOut">
               <a:rPr lang="en-US" smtClean="0"/>
-              <a:t>9/6/2021</a:t>
+              <a:t>11/15/2021</a:t>
             </a:fld>
             <a:endParaRPr lang="en-US"/>
           </a:p>
@@ -3077,7 +3077,7 @@
           <a:p>
             <a:fld id="{07558649-2619-44F9-8F30-2D6466E57529}" type="datetimeFigureOut">
               <a:rPr lang="en-US" smtClean="0"/>
-              <a:t>9/6/2021</a:t>
+              <a:t>11/15/2021</a:t>
             </a:fld>
             <a:endParaRPr lang="en-US"/>
           </a:p>
@@ -3494,7 +3494,7 @@
               <a:rPr lang="es-MX" b="1" dirty="0">
                 <a:latin typeface="Century Gothic" panose="020B0502020202020204" pitchFamily="34" charset="0"/>
               </a:rPr>
-              <a:t>30/08/2021 – 03/09/2021</a:t>
+              <a:t>08/11/2021 – 12/11/2021</a:t>
             </a:r>
             <a:endParaRPr lang="es-MX" dirty="0">
               <a:latin typeface="Century Gothic" panose="020B0502020202020204" pitchFamily="34" charset="0"/>
@@ -3575,9 +3575,17 @@
                   <a:srgbClr val="3F1900"/>
                 </a:solidFill>
               </a:rPr>
-              <a:t>Reporte de Rechazos.</a:t>
-            </a:r>
-            <a:endParaRPr lang="en-US" sz="2000" dirty="0">
+              <a:t>Reporte de Material Liberado </a:t>
+            </a:r>
+            <a:r>
+              <a:rPr lang="es-ES" sz="2000" b="1" dirty="0">
+                <a:solidFill>
+                  <a:srgbClr val="3F1900"/>
+                </a:solidFill>
+              </a:rPr>
+              <a:t>(Ultima estación de Calidad).</a:t>
+            </a:r>
+            <a:endParaRPr lang="en-US" sz="2000" b="1" dirty="0">
               <a:solidFill>
                 <a:srgbClr val="3F1900"/>
               </a:solidFill>
@@ -3767,7 +3775,7 @@
         <p:spPr>
           <a:xfrm>
             <a:off x="1115616" y="1082884"/>
-            <a:ext cx="7956376" cy="646331"/>
+            <a:ext cx="7956376" cy="461665"/>
           </a:xfrm>
           <a:prstGeom prst="rect">
             <a:avLst/>
@@ -3799,7 +3807,7 @@
                 </a:solidFill>
                 <a:latin typeface="Segoe UI" panose="020B0502040204020203" pitchFamily="34" charset="0"/>
               </a:rPr>
-              <a:t>Reporte de Rechazos, </a:t>
+              <a:t>Reporte de Material Liberado, </a:t>
             </a:r>
             <a:r>
               <a:rPr lang="es-ES" sz="1200" dirty="0">
@@ -3907,24 +3915,6 @@
                 </a:solidFill>
                 <a:latin typeface="Segoe UI" panose="020B0502040204020203" pitchFamily="34" charset="0"/>
               </a:rPr>
-              <a:t> de </a:t>
-            </a:r>
-            <a:r>
-              <a:rPr lang="en-US" sz="1200" dirty="0" err="1">
-                <a:solidFill>
-                  <a:srgbClr val="222222"/>
-                </a:solidFill>
-                <a:latin typeface="Segoe UI" panose="020B0502040204020203" pitchFamily="34" charset="0"/>
-              </a:rPr>
-              <a:t>rechazos</a:t>
-            </a:r>
-            <a:r>
-              <a:rPr lang="en-US" sz="1200" dirty="0">
-                <a:solidFill>
-                  <a:srgbClr val="222222"/>
-                </a:solidFill>
-                <a:latin typeface="Segoe UI" panose="020B0502040204020203" pitchFamily="34" charset="0"/>
-              </a:rPr>
               <a:t> por un</a:t>
             </a:r>
             <a:r>
@@ -3964,40 +3954,13 @@
               <a:t>fechas</a:t>
             </a:r>
             <a:r>
-              <a:rPr lang="en-US" sz="1200" dirty="0">
+              <a:rPr lang="en-US" sz="1200" b="1" dirty="0">
                 <a:solidFill>
                   <a:srgbClr val="222222"/>
                 </a:solidFill>
                 <a:latin typeface="Segoe UI" panose="020B0502040204020203" pitchFamily="34" charset="0"/>
               </a:rPr>
-              <a:t>, </a:t>
-            </a:r>
-            <a:r>
-              <a:rPr lang="en-US" sz="1200" b="1" dirty="0">
-                <a:solidFill>
-                  <a:srgbClr val="222222"/>
-                </a:solidFill>
-                <a:latin typeface="Segoe UI" panose="020B0502040204020203" pitchFamily="34" charset="0"/>
-              </a:rPr>
-              <a:t>Product Category</a:t>
-            </a:r>
-            <a:r>
-              <a:rPr lang="en-US" sz="1200" dirty="0">
-                <a:solidFill>
-                  <a:srgbClr val="222222"/>
-                </a:solidFill>
-                <a:latin typeface="Segoe UI" panose="020B0502040204020203" pitchFamily="34" charset="0"/>
-              </a:rPr>
-              <a:t> o </a:t>
-            </a:r>
-            <a:r>
-              <a:rPr lang="en-US" sz="1200" dirty="0" err="1">
-                <a:solidFill>
-                  <a:srgbClr val="222222"/>
-                </a:solidFill>
-                <a:latin typeface="Segoe UI" panose="020B0502040204020203" pitchFamily="34" charset="0"/>
-              </a:rPr>
-              <a:t>poniendo</a:t>
+              <a:t>,</a:t>
             </a:r>
             <a:r>
               <a:rPr lang="en-US" sz="1200" dirty="0">
@@ -4009,13 +3972,13 @@
               <a:t> </a:t>
             </a:r>
             <a:r>
-              <a:rPr lang="en-US" sz="1200" dirty="0" err="1">
+              <a:rPr lang="en-US" sz="1200" b="1" dirty="0">
                 <a:solidFill>
                   <a:srgbClr val="222222"/>
                 </a:solidFill>
                 <a:latin typeface="Segoe UI" panose="020B0502040204020203" pitchFamily="34" charset="0"/>
               </a:rPr>
-              <a:t>el</a:t>
+              <a:t>Product Category,</a:t>
             </a:r>
             <a:r>
               <a:rPr lang="en-US" sz="1200" dirty="0">
@@ -4033,100 +3996,10 @@
                 </a:solidFill>
                 <a:latin typeface="Segoe UI" panose="020B0502040204020203" pitchFamily="34" charset="0"/>
               </a:rPr>
-              <a:t>Numero</a:t>
+              <a:t>Cliente</a:t>
             </a:r>
             <a:r>
               <a:rPr lang="en-US" sz="1200" b="1" dirty="0">
-                <a:solidFill>
-                  <a:srgbClr val="222222"/>
-                </a:solidFill>
-                <a:latin typeface="Segoe UI" panose="020B0502040204020203" pitchFamily="34" charset="0"/>
-              </a:rPr>
-              <a:t> de </a:t>
-            </a:r>
-            <a:r>
-              <a:rPr lang="en-US" sz="1200" b="1" dirty="0" err="1">
-                <a:solidFill>
-                  <a:srgbClr val="222222"/>
-                </a:solidFill>
-                <a:latin typeface="Segoe UI" panose="020B0502040204020203" pitchFamily="34" charset="0"/>
-              </a:rPr>
-              <a:t>Parte</a:t>
-            </a:r>
-            <a:r>
-              <a:rPr lang="en-US" sz="1200" b="1" dirty="0">
-                <a:solidFill>
-                  <a:srgbClr val="222222"/>
-                </a:solidFill>
-                <a:latin typeface="Segoe UI" panose="020B0502040204020203" pitchFamily="34" charset="0"/>
-              </a:rPr>
-              <a:t> del </a:t>
-            </a:r>
-            <a:r>
-              <a:rPr lang="en-US" sz="1200" b="1" dirty="0" err="1">
-                <a:solidFill>
-                  <a:srgbClr val="222222"/>
-                </a:solidFill>
-                <a:latin typeface="Segoe UI" panose="020B0502040204020203" pitchFamily="34" charset="0"/>
-              </a:rPr>
-              <a:t>Cliente</a:t>
-            </a:r>
-            <a:r>
-              <a:rPr lang="en-US" sz="1200" dirty="0">
-                <a:solidFill>
-                  <a:srgbClr val="222222"/>
-                </a:solidFill>
-                <a:latin typeface="Segoe UI" panose="020B0502040204020203" pitchFamily="34" charset="0"/>
-              </a:rPr>
-              <a:t>, </a:t>
-            </a:r>
-            <a:r>
-              <a:rPr lang="en-US" sz="1200" b="1" dirty="0">
-                <a:solidFill>
-                  <a:srgbClr val="222222"/>
-                </a:solidFill>
-                <a:latin typeface="Segoe UI" panose="020B0502040204020203" pitchFamily="34" charset="0"/>
-              </a:rPr>
-              <a:t>Serial</a:t>
-            </a:r>
-            <a:r>
-              <a:rPr lang="en-US" sz="1200" dirty="0">
-                <a:solidFill>
-                  <a:srgbClr val="222222"/>
-                </a:solidFill>
-                <a:latin typeface="Segoe UI" panose="020B0502040204020203" pitchFamily="34" charset="0"/>
-              </a:rPr>
-              <a:t>, </a:t>
-            </a:r>
-            <a:r>
-              <a:rPr lang="en-US" sz="1200" b="1" dirty="0">
-                <a:solidFill>
-                  <a:srgbClr val="222222"/>
-                </a:solidFill>
-                <a:latin typeface="Segoe UI" panose="020B0502040204020203" pitchFamily="34" charset="0"/>
-              </a:rPr>
-              <a:t>Orden</a:t>
-            </a:r>
-            <a:r>
-              <a:rPr lang="en-US" sz="1200" dirty="0">
-                <a:solidFill>
-                  <a:srgbClr val="222222"/>
-                </a:solidFill>
-                <a:latin typeface="Segoe UI" panose="020B0502040204020203" pitchFamily="34" charset="0"/>
-              </a:rPr>
-              <a:t>, </a:t>
-            </a:r>
-            <a:r>
-              <a:rPr lang="en-US" sz="1200" b="1" dirty="0" err="1">
-                <a:solidFill>
-                  <a:srgbClr val="222222"/>
-                </a:solidFill>
-                <a:latin typeface="Segoe UI" panose="020B0502040204020203" pitchFamily="34" charset="0"/>
-              </a:rPr>
-              <a:t>Estación</a:t>
-            </a:r>
-            <a:r>
-              <a:rPr lang="en-US" sz="1200" dirty="0">
                 <a:solidFill>
                   <a:srgbClr val="222222"/>
                 </a:solidFill>
@@ -4135,16 +4008,16 @@
               <a:t> </a:t>
             </a:r>
             <a:r>
-              <a:rPr lang="en-US" sz="1200" dirty="0" err="1">
+              <a:rPr lang="en-US" sz="1200" dirty="0">
                 <a:solidFill>
                   <a:srgbClr val="222222"/>
                 </a:solidFill>
                 <a:latin typeface="Segoe UI" panose="020B0502040204020203" pitchFamily="34" charset="0"/>
               </a:rPr>
-              <a:t>en</a:t>
-            </a:r>
-            <a:r>
-              <a:rPr lang="en-US" sz="1200" dirty="0">
+              <a:t>y</a:t>
+            </a:r>
+            <a:r>
+              <a:rPr lang="en-US" sz="1200" b="1" dirty="0">
                 <a:solidFill>
                   <a:srgbClr val="222222"/>
                 </a:solidFill>
@@ -4159,7 +4032,7 @@
                 </a:solidFill>
                 <a:latin typeface="Segoe UI" panose="020B0502040204020203" pitchFamily="34" charset="0"/>
               </a:rPr>
-              <a:t>el</a:t>
+              <a:t>si</a:t>
             </a:r>
             <a:r>
               <a:rPr lang="en-US" sz="1200" dirty="0">
@@ -4168,19 +4041,37 @@
                 </a:solidFill>
                 <a:latin typeface="Segoe UI" panose="020B0502040204020203" pitchFamily="34" charset="0"/>
               </a:rPr>
-              <a:t> campo </a:t>
-            </a:r>
-            <a:r>
-              <a:rPr lang="en-US" sz="1200" b="1" dirty="0" err="1">
+              <a:t> se </a:t>
+            </a:r>
+            <a:r>
+              <a:rPr lang="en-US" sz="1200" dirty="0" err="1">
                 <a:solidFill>
                   <a:srgbClr val="222222"/>
                 </a:solidFill>
                 <a:latin typeface="Segoe UI" panose="020B0502040204020203" pitchFamily="34" charset="0"/>
               </a:rPr>
-              <a:t>Buscar</a:t>
-            </a:r>
-            <a:r>
-              <a:rPr lang="en-US" sz="1200" b="1" dirty="0">
+              <a:t>requiere</a:t>
+            </a:r>
+            <a:r>
+              <a:rPr lang="en-US" sz="1200" dirty="0">
+                <a:solidFill>
+                  <a:srgbClr val="222222"/>
+                </a:solidFill>
+                <a:latin typeface="Segoe UI" panose="020B0502040204020203" pitchFamily="34" charset="0"/>
+              </a:rPr>
+              <a:t> se </a:t>
+            </a:r>
+            <a:r>
+              <a:rPr lang="en-US" sz="1200" dirty="0" err="1">
+                <a:solidFill>
+                  <a:srgbClr val="222222"/>
+                </a:solidFill>
+                <a:latin typeface="Segoe UI" panose="020B0502040204020203" pitchFamily="34" charset="0"/>
+              </a:rPr>
+              <a:t>puede</a:t>
+            </a:r>
+            <a:r>
+              <a:rPr lang="en-US" sz="1200" dirty="0">
                 <a:solidFill>
                   <a:srgbClr val="222222"/>
                 </a:solidFill>
@@ -4189,78 +4080,6 @@
               <a:t> </a:t>
             </a:r>
             <a:r>
-              <a:rPr lang="en-US" sz="1200" dirty="0">
-                <a:solidFill>
-                  <a:srgbClr val="222222"/>
-                </a:solidFill>
-                <a:latin typeface="Segoe UI" panose="020B0502040204020203" pitchFamily="34" charset="0"/>
-              </a:rPr>
-              <a:t>y</a:t>
-            </a:r>
-            <a:r>
-              <a:rPr lang="en-US" sz="1200" b="1" dirty="0">
-                <a:solidFill>
-                  <a:srgbClr val="222222"/>
-                </a:solidFill>
-                <a:latin typeface="Segoe UI" panose="020B0502040204020203" pitchFamily="34" charset="0"/>
-              </a:rPr>
-              <a:t> </a:t>
-            </a:r>
-            <a:r>
-              <a:rPr lang="en-US" sz="1200" dirty="0" err="1">
-                <a:solidFill>
-                  <a:srgbClr val="222222"/>
-                </a:solidFill>
-                <a:latin typeface="Segoe UI" panose="020B0502040204020203" pitchFamily="34" charset="0"/>
-              </a:rPr>
-              <a:t>si</a:t>
-            </a:r>
-            <a:r>
-              <a:rPr lang="en-US" sz="1200" dirty="0">
-                <a:solidFill>
-                  <a:srgbClr val="222222"/>
-                </a:solidFill>
-                <a:latin typeface="Segoe UI" panose="020B0502040204020203" pitchFamily="34" charset="0"/>
-              </a:rPr>
-              <a:t> se </a:t>
-            </a:r>
-            <a:r>
-              <a:rPr lang="en-US" sz="1200" dirty="0" err="1">
-                <a:solidFill>
-                  <a:srgbClr val="222222"/>
-                </a:solidFill>
-                <a:latin typeface="Segoe UI" panose="020B0502040204020203" pitchFamily="34" charset="0"/>
-              </a:rPr>
-              <a:t>requiere</a:t>
-            </a:r>
-            <a:r>
-              <a:rPr lang="en-US" sz="1200" dirty="0">
-                <a:solidFill>
-                  <a:srgbClr val="222222"/>
-                </a:solidFill>
-                <a:latin typeface="Segoe UI" panose="020B0502040204020203" pitchFamily="34" charset="0"/>
-              </a:rPr>
-              <a:t> se </a:t>
-            </a:r>
-            <a:r>
-              <a:rPr lang="en-US" sz="1200" dirty="0" err="1">
-                <a:solidFill>
-                  <a:srgbClr val="222222"/>
-                </a:solidFill>
-                <a:latin typeface="Segoe UI" panose="020B0502040204020203" pitchFamily="34" charset="0"/>
-              </a:rPr>
-              <a:t>puede</a:t>
-            </a:r>
-            <a:r>
-              <a:rPr lang="en-US" sz="1200" dirty="0">
-                <a:solidFill>
-                  <a:srgbClr val="222222"/>
-                </a:solidFill>
-                <a:latin typeface="Segoe UI" panose="020B0502040204020203" pitchFamily="34" charset="0"/>
-              </a:rPr>
-              <a:t> </a:t>
-            </a:r>
-            <a:r>
               <a:rPr lang="en-US" sz="1200" dirty="0" err="1">
                 <a:solidFill>
                   <a:srgbClr val="222222"/>
@@ -4297,7 +4116,7 @@
               <a:t> a un </a:t>
             </a:r>
             <a:r>
-              <a:rPr lang="en-US" sz="1200" dirty="0" err="1">
+              <a:rPr lang="en-US" sz="1200" b="1" dirty="0" err="1">
                 <a:solidFill>
                   <a:srgbClr val="222222"/>
                 </a:solidFill>
@@ -4342,64 +4161,12 @@
           </a:p>
         </p:txBody>
       </p:sp>
-      <p:sp>
-        <p:nvSpPr>
-          <p:cNvPr id="12" name="Rectángulo 11">
+      <p:pic>
+        <p:nvPicPr>
+          <p:cNvPr id="5" name="Imagen 4">
             <a:extLst>
               <a:ext uri="{FF2B5EF4-FFF2-40B4-BE49-F238E27FC236}">
-                <a16:creationId xmlns:a16="http://schemas.microsoft.com/office/drawing/2014/main" id="{0FB7EE74-224C-43BD-B116-6217EFFC0123}"/>
-              </a:ext>
-            </a:extLst>
-          </p:cNvPr>
-          <p:cNvSpPr/>
-          <p:nvPr/>
-        </p:nvSpPr>
-        <p:spPr>
-          <a:xfrm>
-            <a:off x="1763688" y="2492895"/>
-            <a:ext cx="2520280" cy="329893"/>
-          </a:xfrm>
-          <a:prstGeom prst="rect">
-            <a:avLst/>
-          </a:prstGeom>
-          <a:noFill/>
-          <a:ln>
-            <a:solidFill>
-              <a:srgbClr val="FF0000"/>
-            </a:solidFill>
-          </a:ln>
-        </p:spPr>
-        <p:style>
-          <a:lnRef idx="2">
-            <a:schemeClr val="accent1">
-              <a:shade val="50000"/>
-            </a:schemeClr>
-          </a:lnRef>
-          <a:fillRef idx="1">
-            <a:schemeClr val="accent1"/>
-          </a:fillRef>
-          <a:effectRef idx="0">
-            <a:schemeClr val="accent1"/>
-          </a:effectRef>
-          <a:fontRef idx="minor">
-            <a:schemeClr val="lt1"/>
-          </a:fontRef>
-        </p:style>
-        <p:txBody>
-          <a:bodyPr rtlCol="0" anchor="ctr"/>
-          <a:lstStyle/>
-          <a:p>
-            <a:pPr algn="ctr"/>
-            <a:endParaRPr lang="en-US"/>
-          </a:p>
-        </p:txBody>
-      </p:sp>
-      <p:pic>
-        <p:nvPicPr>
-          <p:cNvPr id="3" name="Imagen 2" descr="Interfaz de usuario gráfica, Texto, Aplicación&#10;&#10;Descripción generada automáticamente">
-            <a:extLst>
-              <a:ext uri="{FF2B5EF4-FFF2-40B4-BE49-F238E27FC236}">
-                <a16:creationId xmlns:a16="http://schemas.microsoft.com/office/drawing/2014/main" id="{6ECA891F-0C90-438B-A012-EE7DF58793FC}"/>
+                <a16:creationId xmlns:a16="http://schemas.microsoft.com/office/drawing/2014/main" id="{9B2CC7B9-5BD0-4BAC-9102-4B17B0DB3C99}"/>
               </a:ext>
             </a:extLst>
           </p:cNvPr>
@@ -4409,21 +4176,15 @@
           <p:nvPr/>
         </p:nvPicPr>
         <p:blipFill>
-          <a:blip r:embed="rId2">
-            <a:extLst>
-              <a:ext uri="{28A0092B-C50C-407E-A947-70E740481C1C}">
-                <a14:useLocalDpi xmlns:a14="http://schemas.microsoft.com/office/drawing/2010/main" val="0"/>
-              </a:ext>
-            </a:extLst>
-          </a:blip>
+          <a:blip r:embed="rId2"/>
           <a:stretch>
             <a:fillRect/>
           </a:stretch>
         </p:blipFill>
         <p:spPr>
           <a:xfrm>
-            <a:off x="1087408" y="1729216"/>
-            <a:ext cx="7984584" cy="5087112"/>
+            <a:off x="1115617" y="1700808"/>
+            <a:ext cx="7992888" cy="5137780"/>
           </a:xfrm>
           <a:prstGeom prst="rect">
             <a:avLst/>
